--- a/dataset/guides_final/SYS/guide/IT-SYS-006_공유 드라이브·파일 복구 가이드.pptx
+++ b/dataset/guides_final/SYS/guide/IT-SYS-006_공유 드라이브·파일 복구 가이드.pptx
@@ -3250,7 +3250,7 @@
                 <a:ea typeface="Malgun Gothic"/>
                 <a:cs typeface="Malgun Gothic"/>
               </a:rPr>
-              <a:t>한화시스템 ICT 임직원 IT 안내 · 사내 시스템</a:t>
+              <a:t>가상 ICT 기업 임직원 IT 안내 · 사내 시스템</a:t>
             </a:r>
           </a:p>
         </p:txBody>
@@ -3482,7 +3482,7 @@
                 <a:ea typeface="Malgun Gothic"/>
                 <a:cs typeface="Malgun Gothic"/>
               </a:rPr>
-              <a:t>© HANWHA SYSTEMS ICT · IT-SYS-006 · 사내 일반</a:t>
+              <a:t>© 가상 ICT 기업 · IT-SYS-006 · 사내 일반</a:t>
             </a:r>
           </a:p>
         </p:txBody>
@@ -6232,7 +6232,7 @@
                 <a:ea typeface="Malgun Gothic"/>
                 <a:cs typeface="Malgun Gothic"/>
               </a:rPr>
-              <a:t>© HANWHA SYSTEMS ICT · IT-SYS-006 · 사내 일반</a:t>
+              <a:t>© 가상 ICT 기업 · IT-SYS-006 · 사내 일반</a:t>
             </a:r>
           </a:p>
         </p:txBody>
@@ -6771,7 +6771,7 @@
                 <a:ea typeface="Malgun Gothic"/>
                 <a:cs typeface="Malgun Gothic"/>
               </a:rPr>
-              <a:t>© HANWHA SYSTEMS ICT · IT-SYS-006 · 사내 일반</a:t>
+              <a:t>© 가상 ICT 기업 · IT-SYS-006 · 사내 일반</a:t>
             </a:r>
           </a:p>
         </p:txBody>
@@ -7334,7 +7334,7 @@
                 <a:ea typeface="Malgun Gothic"/>
                 <a:cs typeface="Malgun Gothic"/>
               </a:rPr>
-              <a:t>© HANWHA SYSTEMS ICT · IT-SYS-006 · 사내 일반</a:t>
+              <a:t>© 가상 ICT 기업 · IT-SYS-006 · 사내 일반</a:t>
             </a:r>
           </a:p>
         </p:txBody>
@@ -7921,7 +7921,7 @@
                 <a:ea typeface="Malgun Gothic"/>
                 <a:cs typeface="Malgun Gothic"/>
               </a:rPr>
-              <a:t>© HANWHA SYSTEMS ICT · IT-SYS-006 · 사내 일반</a:t>
+              <a:t>© 가상 ICT 기업 · IT-SYS-006 · 사내 일반</a:t>
             </a:r>
           </a:p>
         </p:txBody>
@@ -8626,7 +8626,7 @@
                 <a:ea typeface="Malgun Gothic"/>
                 <a:cs typeface="Malgun Gothic"/>
               </a:rPr>
-              <a:t>© HANWHA SYSTEMS ICT · IT-SYS-006 · 사내 일반</a:t>
+              <a:t>© 가상 ICT 기업 · IT-SYS-006 · 사내 일반</a:t>
             </a:r>
           </a:p>
         </p:txBody>
@@ -11282,7 +11282,7 @@
                 <a:ea typeface="Malgun Gothic"/>
                 <a:cs typeface="Malgun Gothic"/>
               </a:rPr>
-              <a:t>© HANWHA SYSTEMS ICT · IT-SYS-006 · 사내 일반</a:t>
+              <a:t>© 가상 ICT 기업 · IT-SYS-006 · 사내 일반</a:t>
             </a:r>
           </a:p>
         </p:txBody>
@@ -11986,7 +11986,7 @@
                 <a:ea typeface="Malgun Gothic"/>
                 <a:cs typeface="Malgun Gothic"/>
               </a:rPr>
-              <a:t>© HANWHA SYSTEMS ICT · IT-SYS-006 · 사내 일반</a:t>
+              <a:t>© 가상 ICT 기업 · IT-SYS-006 · 사내 일반</a:t>
             </a:r>
           </a:p>
         </p:txBody>
@@ -12573,7 +12573,7 @@
                 <a:ea typeface="Malgun Gothic"/>
                 <a:cs typeface="Malgun Gothic"/>
               </a:rPr>
-              <a:t>© HANWHA SYSTEMS ICT · IT-SYS-006 · 사내 일반</a:t>
+              <a:t>© 가상 ICT 기업 · IT-SYS-006 · 사내 일반</a:t>
             </a:r>
           </a:p>
         </p:txBody>
@@ -13136,7 +13136,7 @@
                 <a:ea typeface="Malgun Gothic"/>
                 <a:cs typeface="Malgun Gothic"/>
               </a:rPr>
-              <a:t>© HANWHA SYSTEMS ICT · IT-SYS-006 · 사내 일반</a:t>
+              <a:t>© 가상 ICT 기업 · IT-SYS-006 · 사내 일반</a:t>
             </a:r>
           </a:p>
         </p:txBody>
@@ -13864,7 +13864,7 @@
                 <a:ea typeface="Malgun Gothic"/>
                 <a:cs typeface="Malgun Gothic"/>
               </a:rPr>
-              <a:t>© HANWHA SYSTEMS ICT · IT-SYS-006 · 사내 일반</a:t>
+              <a:t>© 가상 ICT 기업 · IT-SYS-006 · 사내 일반</a:t>
             </a:r>
           </a:p>
         </p:txBody>
@@ -15669,7 +15669,7 @@
                 <a:ea typeface="Malgun Gothic"/>
                 <a:cs typeface="Malgun Gothic"/>
               </a:rPr>
-              <a:t>© HANWHA SYSTEMS ICT · IT-SYS-006 · 사내 일반</a:t>
+              <a:t>© 가상 ICT 기업 · IT-SYS-006 · 사내 일반</a:t>
             </a:r>
           </a:p>
         </p:txBody>
@@ -17808,7 +17808,7 @@
                 <a:ea typeface="Malgun Gothic"/>
                 <a:cs typeface="Malgun Gothic"/>
               </a:rPr>
-              <a:t>© HANWHA SYSTEMS ICT · IT-SYS-006 · 사내 일반</a:t>
+              <a:t>© 가상 ICT 기업 · IT-SYS-006 · 사내 일반</a:t>
             </a:r>
           </a:p>
         </p:txBody>
@@ -18442,7 +18442,7 @@
                 <a:ea typeface="Malgun Gothic"/>
                 <a:cs typeface="Malgun Gothic"/>
               </a:rPr>
-              <a:t>© HANWHA SYSTEMS ICT · IT-SYS-006 · 사내 일반</a:t>
+              <a:t>© 가상 ICT 기업 · IT-SYS-006 · 사내 일반</a:t>
             </a:r>
           </a:p>
         </p:txBody>
@@ -19052,7 +19052,7 @@
                 <a:ea typeface="Malgun Gothic"/>
                 <a:cs typeface="Malgun Gothic"/>
               </a:rPr>
-              <a:t>© HANWHA SYSTEMS ICT · IT-SYS-006 · 사내 일반</a:t>
+              <a:t>© 가상 ICT 기업 · IT-SYS-006 · 사내 일반</a:t>
             </a:r>
           </a:p>
         </p:txBody>
@@ -19639,7 +19639,7 @@
                 <a:ea typeface="Malgun Gothic"/>
                 <a:cs typeface="Malgun Gothic"/>
               </a:rPr>
-              <a:t>© HANWHA SYSTEMS ICT · IT-SYS-006 · 사내 일반</a:t>
+              <a:t>© 가상 ICT 기업 · IT-SYS-006 · 사내 일반</a:t>
             </a:r>
           </a:p>
         </p:txBody>
@@ -20250,7 +20250,7 @@
                 <a:ea typeface="Malgun Gothic"/>
                 <a:cs typeface="Malgun Gothic"/>
               </a:rPr>
-              <a:t>© HANWHA SYSTEMS ICT · IT-SYS-006 · 사내 일반</a:t>
+              <a:t>© 가상 ICT 기업 · IT-SYS-006 · 사내 일반</a:t>
             </a:r>
           </a:p>
         </p:txBody>
@@ -22524,7 +22524,7 @@
                 <a:ea typeface="Malgun Gothic"/>
                 <a:cs typeface="Malgun Gothic"/>
               </a:rPr>
-              <a:t>© HANWHA SYSTEMS ICT · IT-SYS-006 · 사내 일반</a:t>
+              <a:t>© 가상 ICT 기업 · IT-SYS-006 · 사내 일반</a:t>
             </a:r>
           </a:p>
         </p:txBody>
@@ -23371,7 +23371,7 @@
                 <a:ea typeface="Malgun Gothic"/>
                 <a:cs typeface="Malgun Gothic"/>
               </a:rPr>
-              <a:t>© HANWHA SYSTEMS ICT · IT-SYS-006 · 사내 일반</a:t>
+              <a:t>© 가상 ICT 기업 · IT-SYS-006 · 사내 일반</a:t>
             </a:r>
           </a:p>
         </p:txBody>
@@ -24146,7 +24146,7 @@
                 <a:ea typeface="Malgun Gothic"/>
                 <a:cs typeface="Malgun Gothic"/>
               </a:rPr>
-              <a:t>© HANWHA SYSTEMS ICT · IT-SYS-006 · 사내 일반</a:t>
+              <a:t>© 가상 ICT 기업 · IT-SYS-006 · 사내 일반</a:t>
             </a:r>
           </a:p>
         </p:txBody>
@@ -24685,7 +24685,7 @@
                 <a:ea typeface="Malgun Gothic"/>
                 <a:cs typeface="Malgun Gothic"/>
               </a:rPr>
-              <a:t>© HANWHA SYSTEMS ICT · IT-SYS-006 · 사내 일반</a:t>
+              <a:t>© 가상 ICT 기업 · IT-SYS-006 · 사내 일반</a:t>
             </a:r>
           </a:p>
         </p:txBody>
@@ -24933,7 +24933,7 @@
                 <a:ea typeface="Malgun Gothic"/>
                 <a:cs typeface="Malgun Gothic"/>
               </a:rPr>
-              <a:t>© HANWHA SYSTEMS ICT · IT-SYS-006 · 사내 일반</a:t>
+              <a:t>© 가상 ICT 기업 · IT-SYS-006 · 사내 일반</a:t>
             </a:r>
           </a:p>
         </p:txBody>
@@ -26209,7 +26209,7 @@
                 <a:ea typeface="Malgun Gothic"/>
                 <a:cs typeface="Malgun Gothic"/>
               </a:rPr>
-              <a:t>© HANWHA SYSTEMS ICT · IT-SYS-006 · 사내 일반</a:t>
+              <a:t>© 가상 ICT 기업 · IT-SYS-006 · 사내 일반</a:t>
             </a:r>
           </a:p>
         </p:txBody>
@@ -26902,7 +26902,7 @@
                 <a:ea typeface="Malgun Gothic"/>
                 <a:cs typeface="Malgun Gothic"/>
               </a:rPr>
-              <a:t>© HANWHA SYSTEMS ICT · IT-SYS-006 · 사내 일반</a:t>
+              <a:t>© 가상 ICT 기업 · IT-SYS-006 · 사내 일반</a:t>
             </a:r>
           </a:p>
         </p:txBody>
@@ -27150,7 +27150,7 @@
                 <a:ea typeface="Malgun Gothic"/>
                 <a:cs typeface="Malgun Gothic"/>
               </a:rPr>
-              <a:t>© HANWHA SYSTEMS ICT · IT-SYS-006 · 사내 일반</a:t>
+              <a:t>© 가상 ICT 기업 · IT-SYS-006 · 사내 일반</a:t>
             </a:r>
           </a:p>
         </p:txBody>
@@ -27715,7 +27715,7 @@
                 <a:ea typeface="Malgun Gothic"/>
                 <a:cs typeface="Malgun Gothic"/>
               </a:rPr>
-              <a:t>© HANWHA SYSTEMS ICT · IT-SYS-006 · 사내 일반</a:t>
+              <a:t>© 가상 ICT 기업 · IT-SYS-006 · 사내 일반</a:t>
             </a:r>
           </a:p>
         </p:txBody>
@@ -27963,7 +27963,7 @@
                 <a:ea typeface="Malgun Gothic"/>
                 <a:cs typeface="Malgun Gothic"/>
               </a:rPr>
-              <a:t>© HANWHA SYSTEMS ICT · IT-SYS-006 · 사내 일반</a:t>
+              <a:t>© 가상 ICT 기업 · IT-SYS-006 · 사내 일반</a:t>
             </a:r>
           </a:p>
         </p:txBody>
@@ -28475,7 +28475,7 @@
                           <a:ea typeface="Malgun Gothic"/>
                           <a:cs typeface="Malgun Gothic"/>
                         </a:rPr>
-                        <a:t>사내 IT 포털(hanwha-admin) 상단 [챗봇 문의]</a:t>
+                        <a:t>사내 IT 포털 상단 [챗봇 문의]</a:t>
                       </a:r>
                     </a:p>
                   </a:txBody>
@@ -29167,7 +29167,7 @@
                           <a:ea typeface="Malgun Gothic"/>
                           <a:cs typeface="Malgun Gothic"/>
                         </a:rPr>
-                        <a:t>it-helpdesk@hanwha-ict.example</a:t>
+                        <a:t>it-helpdesk@ict.example</a:t>
                       </a:r>
                     </a:p>
                   </a:txBody>
@@ -29466,7 +29466,7 @@
                 <a:ea typeface="Malgun Gothic"/>
                 <a:cs typeface="Malgun Gothic"/>
               </a:rPr>
-              <a:t>© HANWHA SYSTEMS ICT · IT-SYS-006 · 사내 일반</a:t>
+              <a:t>© 가상 ICT 기업 · IT-SYS-006 · 사내 일반</a:t>
             </a:r>
           </a:p>
         </p:txBody>
@@ -29714,7 +29714,7 @@
                 <a:ea typeface="Malgun Gothic"/>
                 <a:cs typeface="Malgun Gothic"/>
               </a:rPr>
-              <a:t>© HANWHA SYSTEMS ICT · IT-SYS-006 · 사내 일반</a:t>
+              <a:t>© 가상 ICT 기업 · IT-SYS-006 · 사내 일반</a:t>
             </a:r>
           </a:p>
         </p:txBody>
@@ -31427,7 +31427,7 @@
                 <a:ea typeface="Malgun Gothic"/>
                 <a:cs typeface="Malgun Gothic"/>
               </a:rPr>
-              <a:t>© HANWHA SYSTEMS ICT · IT-SYS-006 · 사내 일반</a:t>
+              <a:t>© 가상 ICT 기업 · IT-SYS-006 · 사내 일반</a:t>
             </a:r>
           </a:p>
         </p:txBody>
@@ -32404,7 +32404,7 @@
                 <a:ea typeface="Malgun Gothic"/>
                 <a:cs typeface="Malgun Gothic"/>
               </a:rPr>
-              <a:t>© HANWHA SYSTEMS ICT · IT-SYS-006 · 사내 일반</a:t>
+              <a:t>© 가상 ICT 기업 · IT-SYS-006 · 사내 일반</a:t>
             </a:r>
           </a:p>
         </p:txBody>
@@ -32652,7 +32652,7 @@
                 <a:ea typeface="Malgun Gothic"/>
                 <a:cs typeface="Malgun Gothic"/>
               </a:rPr>
-              <a:t>© HANWHA SYSTEMS ICT · IT-SYS-006 · 사내 일반</a:t>
+              <a:t>© 가상 ICT 기업 · IT-SYS-006 · 사내 일반</a:t>
             </a:r>
           </a:p>
         </p:txBody>
@@ -33420,7 +33420,7 @@
                 <a:ea typeface="Malgun Gothic"/>
                 <a:cs typeface="Malgun Gothic"/>
               </a:rPr>
-              <a:t>© HANWHA SYSTEMS ICT · IT-SYS-006 · 사내 일반</a:t>
+              <a:t>© 가상 ICT 기업 · IT-SYS-006 · 사내 일반</a:t>
             </a:r>
           </a:p>
         </p:txBody>
@@ -33668,7 +33668,7 @@
                 <a:ea typeface="Malgun Gothic"/>
                 <a:cs typeface="Malgun Gothic"/>
               </a:rPr>
-              <a:t>© HANWHA SYSTEMS ICT · IT-SYS-006 · 사내 일반</a:t>
+              <a:t>© 가상 ICT 기업 · IT-SYS-006 · 사내 일반</a:t>
             </a:r>
           </a:p>
         </p:txBody>
@@ -34327,7 +34327,7 @@
                 <a:ea typeface="Malgun Gothic"/>
                 <a:cs typeface="Malgun Gothic"/>
               </a:rPr>
-              <a:t>© HANWHA SYSTEMS ICT · IT-SYS-006 · 사내 일반</a:t>
+              <a:t>© 가상 ICT 기업 · IT-SYS-006 · 사내 일반</a:t>
             </a:r>
           </a:p>
         </p:txBody>
@@ -34575,7 +34575,7 @@
                 <a:ea typeface="Malgun Gothic"/>
                 <a:cs typeface="Malgun Gothic"/>
               </a:rPr>
-              <a:t>© HANWHA SYSTEMS ICT · IT-SYS-006 · 사내 일반</a:t>
+              <a:t>© 가상 ICT 기업 · IT-SYS-006 · 사내 일반</a:t>
             </a:r>
           </a:p>
         </p:txBody>
@@ -36812,7 +36812,7 @@
                 <a:ea typeface="Malgun Gothic"/>
                 <a:cs typeface="Malgun Gothic"/>
               </a:rPr>
-              <a:t>© HANWHA SYSTEMS ICT · IT-SYS-006 · 사내 일반</a:t>
+              <a:t>© 가상 ICT 기업 · IT-SYS-006 · 사내 일반</a:t>
             </a:r>
           </a:p>
         </p:txBody>
